--- a/3.4 Hoofdstuk 4 - Internationale markten/3.4.5 Paragraaf 5 - Internationaal handelsbeleid/2. Leren/3.4.5 Internationaal handelsbeleid – presentatie.pptx
+++ b/3.4 Hoofdstuk 4 - Internationale markten/3.4.5 Paragraaf 5 - Internationaal handelsbeleid/2. Leren/3.4.5 Internationaal handelsbeleid – presentatie.pptx
@@ -2035,6 +2035,10 @@
             </a:outerShdw>
           </a:effectLst>
         </p:spPr>
+        <p:txBody>
+          <a:bodyPr/>
+          <a:p/>
+        </p:txBody>
       </p:sp>
       <p:sp>
         <p:nvSpPr>
@@ -2055,6 +2059,10 @@
           </a:solidFill>
           <a:ln/>
         </p:spPr>
+        <p:txBody>
+          <a:bodyPr/>
+          <a:p/>
+        </p:txBody>
       </p:sp>
       <p:sp>
         <p:nvSpPr>
@@ -2201,6 +2209,10 @@
             </a:outerShdw>
           </a:effectLst>
         </p:spPr>
+        <p:txBody>
+          <a:bodyPr/>
+          <a:p/>
+        </p:txBody>
       </p:sp>
       <p:sp>
         <p:nvSpPr>
@@ -2221,6 +2233,10 @@
           </a:solidFill>
           <a:ln/>
         </p:spPr>
+        <p:txBody>
+          <a:bodyPr/>
+          <a:p/>
+        </p:txBody>
       </p:sp>
       <p:sp>
         <p:nvSpPr>
@@ -2449,6 +2465,10 @@
             </a:outerShdw>
           </a:effectLst>
         </p:spPr>
+        <p:txBody>
+          <a:bodyPr/>
+          <a:p/>
+        </p:txBody>
       </p:sp>
       <p:sp>
         <p:nvSpPr>
@@ -2517,6 +2537,10 @@
             </a:outerShdw>
           </a:effectLst>
         </p:spPr>
+        <p:txBody>
+          <a:bodyPr/>
+          <a:p/>
+        </p:txBody>
       </p:sp>
       <p:sp>
         <p:nvSpPr>
@@ -2585,6 +2609,10 @@
             </a:outerShdw>
           </a:effectLst>
         </p:spPr>
+        <p:txBody>
+          <a:bodyPr/>
+          <a:p/>
+        </p:txBody>
       </p:sp>
       <p:sp>
         <p:nvSpPr>
@@ -2653,6 +2681,10 @@
             </a:outerShdw>
           </a:effectLst>
         </p:spPr>
+        <p:txBody>
+          <a:bodyPr/>
+          <a:p/>
+        </p:txBody>
       </p:sp>
       <p:sp>
         <p:nvSpPr>
@@ -2721,6 +2753,10 @@
             </a:outerShdw>
           </a:effectLst>
         </p:spPr>
+        <p:txBody>
+          <a:bodyPr/>
+          <a:p/>
+        </p:txBody>
       </p:sp>
       <p:sp>
         <p:nvSpPr>
@@ -2789,6 +2825,10 @@
             </a:outerShdw>
           </a:effectLst>
         </p:spPr>
+        <p:txBody>
+          <a:bodyPr/>
+          <a:p/>
+        </p:txBody>
       </p:sp>
       <p:sp>
         <p:nvSpPr>
@@ -5047,6 +5087,10 @@
             </a:outerShdw>
           </a:effectLst>
         </p:spPr>
+        <p:txBody>
+          <a:bodyPr/>
+          <a:p/>
+        </p:txBody>
       </p:sp>
       <p:sp>
         <p:nvSpPr>
@@ -5067,6 +5111,10 @@
           </a:solidFill>
           <a:ln/>
         </p:spPr>
+        <p:txBody>
+          <a:bodyPr/>
+          <a:p/>
+        </p:txBody>
       </p:sp>
       <p:sp>
         <p:nvSpPr>
@@ -5199,6 +5247,10 @@
             </a:outerShdw>
           </a:effectLst>
         </p:spPr>
+        <p:txBody>
+          <a:bodyPr/>
+          <a:p/>
+        </p:txBody>
       </p:sp>
       <p:sp>
         <p:nvSpPr>
@@ -5219,6 +5271,10 @@
           </a:solidFill>
           <a:ln/>
         </p:spPr>
+        <p:txBody>
+          <a:bodyPr/>
+          <a:p/>
+        </p:txBody>
       </p:sp>
       <p:sp>
         <p:nvSpPr>
@@ -5365,6 +5421,10 @@
             </a:outerShdw>
           </a:effectLst>
         </p:spPr>
+        <p:txBody>
+          <a:bodyPr/>
+          <a:p/>
+        </p:txBody>
       </p:sp>
       <p:sp>
         <p:nvSpPr>
@@ -5385,6 +5445,10 @@
           </a:solidFill>
           <a:ln/>
         </p:spPr>
+        <p:txBody>
+          <a:bodyPr/>
+          <a:p/>
+        </p:txBody>
       </p:sp>
       <p:sp>
         <p:nvSpPr>
@@ -5531,6 +5595,10 @@
             </a:outerShdw>
           </a:effectLst>
         </p:spPr>
+        <p:txBody>
+          <a:bodyPr/>
+          <a:p/>
+        </p:txBody>
       </p:sp>
       <p:sp>
         <p:nvSpPr>
@@ -5551,6 +5619,10 @@
           </a:solidFill>
           <a:ln/>
         </p:spPr>
+        <p:txBody>
+          <a:bodyPr/>
+          <a:p/>
+        </p:txBody>
       </p:sp>
       <p:sp>
         <p:nvSpPr>
@@ -5713,6 +5785,10 @@
             </a:outerShdw>
           </a:effectLst>
         </p:spPr>
+        <p:txBody>
+          <a:bodyPr/>
+          <a:p/>
+        </p:txBody>
       </p:sp>
       <p:sp>
         <p:nvSpPr>
@@ -5733,6 +5809,10 @@
           </a:solidFill>
           <a:ln/>
         </p:spPr>
+        <p:txBody>
+          <a:bodyPr/>
+          <a:p/>
+        </p:txBody>
       </p:sp>
       <p:sp>
         <p:nvSpPr>
@@ -5816,6 +5896,10 @@
             </a:outerShdw>
           </a:effectLst>
         </p:spPr>
+        <p:txBody>
+          <a:bodyPr/>
+          <a:p/>
+        </p:txBody>
       </p:sp>
       <p:sp>
         <p:nvSpPr>
@@ -5836,6 +5920,10 @@
           </a:solidFill>
           <a:ln/>
         </p:spPr>
+        <p:txBody>
+          <a:bodyPr/>
+          <a:p/>
+        </p:txBody>
       </p:sp>
       <p:sp>
         <p:nvSpPr>
@@ -5904,6 +5992,10 @@
             </a:outerShdw>
           </a:effectLst>
         </p:spPr>
+        <p:txBody>
+          <a:bodyPr/>
+          <a:p/>
+        </p:txBody>
       </p:sp>
       <p:sp>
         <p:nvSpPr>
@@ -5924,6 +6016,10 @@
           </a:solidFill>
           <a:ln/>
         </p:spPr>
+        <p:txBody>
+          <a:bodyPr/>
+          <a:p/>
+        </p:txBody>
       </p:sp>
       <p:sp>
         <p:nvSpPr>
@@ -5992,6 +6088,10 @@
             </a:outerShdw>
           </a:effectLst>
         </p:spPr>
+        <p:txBody>
+          <a:bodyPr/>
+          <a:p/>
+        </p:txBody>
       </p:sp>
       <p:sp>
         <p:nvSpPr>
@@ -6012,6 +6112,10 @@
           </a:solidFill>
           <a:ln/>
         </p:spPr>
+        <p:txBody>
+          <a:bodyPr/>
+          <a:p/>
+        </p:txBody>
       </p:sp>
       <p:sp>
         <p:nvSpPr>
@@ -6080,6 +6184,10 @@
             </a:outerShdw>
           </a:effectLst>
         </p:spPr>
+        <p:txBody>
+          <a:bodyPr/>
+          <a:p/>
+        </p:txBody>
       </p:sp>
       <p:sp>
         <p:nvSpPr>
@@ -6100,6 +6208,10 @@
           </a:solidFill>
           <a:ln/>
         </p:spPr>
+        <p:txBody>
+          <a:bodyPr/>
+          <a:p/>
+        </p:txBody>
       </p:sp>
       <p:sp>
         <p:nvSpPr>
@@ -6285,6 +6397,8 @@
               </a:rPr>
               <a:t>Invoerrechten beschermen eigen industrie, maar verlagen doelmatigheid</a:t>
             </a:r>
+          </a:p>
+          <a:p>
             <a:pPr algn="l" marL="342900" indent="-342900">
               <a:lnSpc>
                 <a:spcPct val="160000"/>
@@ -6306,6 +6420,8 @@
               </a:rPr>
               <a:t>Bij Cournot met tarief: reactielijn buitenlander verschuift naar binnen</a:t>
             </a:r>
+          </a:p>
+          <a:p>
             <a:pPr algn="l" marL="342900" indent="-342900">
               <a:lnSpc>
                 <a:spcPct val="160000"/>
@@ -6327,6 +6443,8 @@
               </a:rPr>
               <a:t>Surplusverlies is groter dan de belastingopbrengst</a:t>
             </a:r>
+          </a:p>
+          <a:p>
             <a:pPr algn="l" marL="342900" indent="-342900">
               <a:lnSpc>
                 <a:spcPct val="160000"/>
@@ -6348,6 +6466,8 @@
               </a:rPr>
               <a:t>Wisselkoersen: bepaald door vraag en aanbod op valutamarkt</a:t>
             </a:r>
+          </a:p>
+          <a:p>
             <a:pPr algn="l" marL="342900" indent="-342900">
               <a:lnSpc>
                 <a:spcPct val="160000"/>
@@ -6369,7 +6489,6 @@
               </a:rPr>
               <a:t>Handelsverdragen verlagen barrières; wisselkoersmanipulatie is oneerlijk</a:t>
             </a:r>
-            <a:endParaRPr lang="en-US" sz="1500" dirty="0"/>
           </a:p>
         </p:txBody>
       </p:sp>
